--- a/DBTUNING/ch12_SORT_GROUPBY_집계/ch12_교안.pptx
+++ b/DBTUNING/ch12_SORT_GROUPBY_집계/ch12_교안.pptx
@@ -546,7 +546,7 @@
           <a:lstStyle/>
           <a:p>
             <a:r>
-              <a:t>제10장은 리포트성 쿼리의 뼈대인 집계와 정렬을 다룬다. 이 두 연산은 앞 단계 결과가 다 모여야 처리되는 블로킹 연산이라 자원 소비가 크고, 그만큼 "언제 생략되는가"가 중요하다. 이번 장은 두 가지 흔한 통념 — 필터를 먼저 걸어야 집계가 빠르다, 인덱스 컬럼으로 정렬하면 정렬이 생략된다 — 를 실습 DB 실측으로 검증한다. 두 통념 모두 조건이 붙어야 성립한다는 것이 결론이다. 첫 시간에는 챕터 번호와 부제만 짚고 넘어가되, 이번 장의 결론이 결국 실행계획을 봐야 안다로 귀결된다는 점만 예고해 두면 학습자가 실측 결과를 기다리는 자세로 듣게 된다.</a:t>
+              <a:t>제ch12은 리포트성 쿼리의 뼈대인 집계와 정렬을 다룬다. 이 두 연산은 앞 단계 결과가 다 모여야 처리되는 블로킹 연산이라 자원 소비가 크고, 그만큼 "언제 생략되는가"가 중요하다. 이번 장은 두 가지 흔한 통념 — 필터를 먼저 걸어야 집계가 빠르다, 인덱스 컬럼으로 정렬하면 정렬이 생략된다 — 를 실습 DB 실측으로 검증한다. 두 통념 모두 조건이 붙어야 성립한다는 것이 결론이다. 첫 시간에는 챕터 번호와 부제만 짚고 넘어가되, 이번 장의 결론이 결국 실행계획을 봐야 안다로 귀결된다는 점만 예고해 두면 학습자가 실측 결과를 기다리는 자세로 듣게 된다.</a:t>
             </a:r>
           </a:p>
         </p:txBody>
@@ -1946,7 +1946,7 @@
           <a:lstStyle/>
           <a:p>
             <a:r>
-              <a:t>다섯 번째 절은 이번 장의 두 번째 실측이자 더 흥미로운 사례다. 같은 컬럼, 같은 테이블, 같은 SQL 형태인데 필터 범위만 바꿨더니 정렬 생략 여부가 갈렸다. Chapter 4에서 배운 선택도에 따른 접근 방식 전환이 정렬에까지 영향을 미친다는 것을 보여 주는 구간이라, 앞 챕터와의 연결을 명시적으로 짚어 주면 좋다. 이 절은 표 두 장이 핵심이라 슬라이드를 오가며 비교하게 된다. 두 표를 인쇄물로 나란히 배포하면 수업 진행이 훨씬 매끄러워진다.</a:t>
+              <a:t>다섯 번째 절은 이번 장의 두 번째 실측이자 더 흥미로운 사례다. 같은 컬럼, 같은 테이블, 같은 SQL 형태인데 필터 범위만 바꿨더니 정렬 생략 여부가 갈렸다. ch05에서 배운 선택도에 따른 접근 방식 전환이 정렬에까지 영향을 미친다는 것을 보여 주는 구간이라, 앞 챕터와의 연결을 명시적으로 짚어 주면 좋다. 이 절은 표 두 장이 핵심이라 슬라이드를 오가며 비교하게 된다. 두 표를 인쇄물로 나란히 배포하면 수업 진행이 훨씬 매끄러워진다.</a:t>
             </a:r>
           </a:p>
         </p:txBody>
@@ -2926,7 +2926,7 @@
           <a:lstStyle/>
           <a:p>
             <a:r>
-              <a:t>체크리스트는 학습자가 현장에서 그대로 꺼내 쓸 수 있는 형태로 남긴다. 앞의 두 항목은 SQL 텍스트만 보고도 판단할 수 있지만, 뒤의 항목은 반드시 실행계획을 떠야 답할 수 있다는 차이를 짚어 주면 좋다. 이 차이가 곧 코드 리뷰의 한계이자 실행계획 확인이 필요한 이유이며, 1장부터 이어져 온 이 과정의 일관된 메시지다. 체크리스트를 노트에 옮겨 적게 하고, 실습 문제를 풀 때 이 순서 그대로 적용해 보라고 안내하면 학습이 훈련으로 이어진다.</a:t>
+              <a:t>체크리스트는 학습자가 현장에서 그대로 꺼내 쓸 수 있는 형태로 남긴다. 앞의 두 항목은 SQL 텍스트만 보고도 판단할 수 있지만, 뒤의 항목은 반드시 실행계획을 떠야 답할 수 있다는 차이를 짚어 주면 좋다. 이 차이가 곧 코드 리뷰의 한계이자 실행계획 확인이 필요한 이유이며, ch01부터 이어져 온 이 과정의 일관된 메시지다. 체크리스트를 노트에 옮겨 적게 하고, 실습 문제를 풀 때 이 순서 그대로 적용해 보라고 안내하면 학습이 훈련으로 이어진다.</a:t>
             </a:r>
           </a:p>
         </p:txBody>
@@ -6713,7 +6713,7 @@
                 </a:solidFill>
                 <a:latin typeface="Malgun Gothic"/>
               </a:rPr>
-              <a:t>Oracle SQL 튜닝 과정  ·  제10장</a:t>
+              <a:t>Oracle SQL 튜닝 과정  ·  제ch12</a:t>
             </a:r>
           </a:p>
         </p:txBody>
@@ -7697,7 +7697,7 @@
                 </a:solidFill>
                 <a:latin typeface="Malgun Gothic"/>
               </a:rPr>
-              <a:t>    –  실행계획의 OMem·1Mem·Used-Mem 컬럼으로 사용량을 확인할 수 있다 (Chapter 1)</a:t>
+              <a:t>    –  실행계획의 OMem·1Mem·Used-Mem 컬럼으로 사용량을 확인할 수 있다 (ch01)</a:t>
             </a:r>
           </a:p>
           <a:p>
@@ -8183,7 +8183,7 @@
                 </a:solidFill>
                 <a:latin typeface="Malgun Gothic"/>
               </a:rPr>
-              <a:t>•  Chapter 8 인라인 뷰 사례와의 대조</a:t>
+              <a:t>•  ch10 인라인 뷰 사례와의 대조</a:t>
             </a:r>
           </a:p>
         </p:txBody>
@@ -8932,7 +8932,7 @@
                 </a:solidFill>
                 <a:latin typeface="Malgun Gothic"/>
               </a:rPr>
-              <a:t>Chapter 8 인라인 뷰 사례와의 대조</a:t>
+              <a:t>ch10 인라인 뷰 사례와의 대조</a:t>
             </a:r>
           </a:p>
         </p:txBody>
@@ -8966,7 +8966,7 @@
                 </a:solidFill>
                 <a:latin typeface="Malgun Gothic"/>
               </a:rPr>
-              <a:t>•  Chapter 8 — 인라인 뷰 바깥의 WHERE v.cnt &gt; 1000</a:t>
+              <a:t>•  ch10 — 인라인 뷰 바깥의 WHERE v.cnt &gt; 1000</a:t>
             </a:r>
           </a:p>
           <a:p>
@@ -8999,7 +8999,7 @@
                 </a:solidFill>
                 <a:latin typeface="Malgun Gothic"/>
               </a:rPr>
-              <a:t>•  Chapter 10 — 인라인 뷰 바깥의 WHERE claim_type = '입원'</a:t>
+              <a:t>•  ch12 — 인라인 뷰 바깥의 WHERE claim_type = '입원'</a:t>
             </a:r>
           </a:p>
           <a:p>
@@ -9176,7 +9176,7 @@
                 </a:solidFill>
                 <a:latin typeface="Malgun Gothic"/>
               </a:rPr>
-              <a:t>Chapter 8에서는 밀어넣기가 불가능했지만, 집계 자체를 다시 계산할 필요는 없어 비용은 같았다 — 밀어넣기 불가가 곧 손해를 뜻하지는 않는다.</a:t>
+              <a:t>ch10에서는 밀어넣기가 불가능했지만, 집계 자체를 다시 계산할 필요는 없어 비용은 같았다 — 밀어넣기 불가가 곧 손해를 뜻하지는 않는다.</a:t>
             </a:r>
           </a:p>
         </p:txBody>
@@ -10463,7 +10463,7 @@
                 </a:solidFill>
                 <a:latin typeface="Consolas"/>
               </a:rPr>
-              <a:t>-- Chapter 8의 WHERE v.cnt &gt; 1000 과는 참조 대상이 다르다</a:t>
+              <a:t>-- ch10의 WHERE v.cnt &gt; 1000 과는 참조 대상이 다르다</a:t>
             </a:r>
           </a:p>
         </p:txBody>
@@ -11832,7 +11832,7 @@
                 </a:solidFill>
                 <a:latin typeface="Malgun Gothic"/>
               </a:rPr>
-              <a:t>•  8.5% 구간은 Chapter 4에서 이미 Full Scan 전환 구간으로 확인된 범위다</a:t>
+              <a:t>•  8.5% 구간은 ch05에서 이미 Full Scan 전환 구간으로 확인된 범위다</a:t>
             </a:r>
           </a:p>
           <a:p>
@@ -12036,7 +12036,7 @@
                 </a:solidFill>
                 <a:latin typeface="Malgun Gothic"/>
               </a:rPr>
-              <a:t>    –  Predicate Pushdown / 그룹 키 필터 / HAVING / Chapter 8 사례와의 대조</a:t>
+              <a:t>    –  Predicate Pushdown / 그룹 키 필터 / HAVING / ch10 사례와의 대조</a:t>
             </a:r>
           </a:p>
           <a:p>
@@ -12102,7 +12102,7 @@
                 </a:solidFill>
                 <a:latin typeface="Malgun Gothic"/>
               </a:rPr>
-              <a:t>    –  두 조건 / Chapter 4와의 연결 / HASH GROUP BY의 생략 불가 / 체크리스트</a:t>
+              <a:t>    –  두 조건 / ch05와의 연결 / HASH GROUP BY의 생략 불가 / 체크리스트</a:t>
             </a:r>
           </a:p>
           <a:p>
@@ -12428,7 +12428,7 @@
                 </a:solidFill>
                 <a:latin typeface="Consolas"/>
               </a:rPr>
-              <a:t>-- Chapter 4에서 확인된 Full Scan 전환 구간이라 인덱스 자체가 채택되지 않았다</a:t>
+              <a:t>-- ch05에서 확인된 Full Scan 전환 구간이라 인덱스 자체가 채택되지 않았다</a:t>
             </a:r>
           </a:p>
         </p:txBody>
@@ -12599,7 +12599,7 @@
                 </a:solidFill>
                 <a:latin typeface="Malgun Gothic"/>
               </a:rPr>
-              <a:t>    –  Chapter 4의 접근 방식 전환 원칙에 따라 옵티마이저가 TABLE ACCESS FULL을 선택했다</a:t>
+              <a:t>    –  ch05의 접근 방식 전환 원칙에 따라 옵티마이저가 TABLE ACCESS FULL을 선택했다</a:t>
             </a:r>
           </a:p>
           <a:p>
@@ -13129,7 +13129,7 @@
                 </a:solidFill>
                 <a:latin typeface="Malgun Gothic"/>
               </a:rPr>
-              <a:t>    –  Chapter 4의 원칙이 그대로 적용된 결과다</a:t>
+              <a:t>    –  ch05의 원칙이 그대로 적용된 결과다</a:t>
             </a:r>
           </a:p>
           <a:p>
@@ -13377,7 +13377,7 @@
                 </a:solidFill>
                 <a:latin typeface="Malgun Gothic"/>
               </a:rPr>
-              <a:t>    –  BATCHED는 개별 접근보다 효율적일 수 있다 (Chapter 3)</a:t>
+              <a:t>    –  BATCHED는 개별 접근보다 효율적일 수 있다 (ch03)</a:t>
             </a:r>
           </a:p>
           <a:p>
@@ -13715,7 +13715,7 @@
                 </a:solidFill>
                 <a:latin typeface="Malgun Gothic"/>
               </a:rPr>
-              <a:t>•  Chapter 4 선택도 원칙과의 연결</a:t>
+              <a:t>•  ch05 선택도 원칙과의 연결</a:t>
             </a:r>
           </a:p>
           <a:p>
@@ -14056,7 +14056,7 @@
                 </a:solidFill>
                 <a:latin typeface="Malgun Gothic"/>
               </a:rPr>
-              <a:t>Chapter 4 선택도 원칙과의 연결</a:t>
+              <a:t>ch05 선택도 원칙과의 연결</a:t>
             </a:r>
           </a:p>
         </p:txBody>
@@ -14090,7 +14090,7 @@
                 </a:solidFill>
                 <a:latin typeface="Malgun Gothic"/>
               </a:rPr>
-              <a:t>•  Chapter 4에서 다룬 원칙 — 선택도에 따라 접근 방식이 전환된다</a:t>
+              <a:t>•  ch05에서 다룬 원칙 — 선택도에 따라 접근 방식이 전환된다</a:t>
             </a:r>
           </a:p>
           <a:p>
@@ -16011,7 +16011,7 @@
                 </a:solidFill>
                 <a:latin typeface="Malgun Gothic"/>
               </a:rPr>
-              <a:t>•  같은 컬럼이라도 선택도에 따라 정렬 생략 여부가 달라진다 (Chapter 4와 연결)</a:t>
+              <a:t>•  같은 컬럼이라도 선택도에 따라 정렬 생략 여부가 달라진다 (ch05와 연결)</a:t>
             </a:r>
           </a:p>
           <a:p>
@@ -16160,7 +16160,7 @@
                 </a:solidFill>
                 <a:latin typeface="Malgun Gothic"/>
               </a:rPr>
-              <a:t>•  실습문제 10문항 — SQL튜닝_Ch10_문제.md</a:t>
+              <a:t>•  실습문제 10문항 — ch12_문제.md</a:t>
             </a:r>
           </a:p>
           <a:p>
@@ -16182,7 +16182,7 @@
                 </a:solidFill>
                 <a:latin typeface="Malgun Gothic"/>
               </a:rPr>
-              <a:t>    –  3번  Chapter 8 인라인 뷰 사례와의 차이 — 집계 결과 필터와 그룹 키 필터</a:t>
+              <a:t>    –  3번  ch10 인라인 뷰 사례와의 차이 — 집계 결과 필터와 그룹 키 필터</a:t>
             </a:r>
           </a:p>
           <a:p>

--- a/DBTUNING/ch12_SORT_GROUPBY_집계/ch12_교안.pptx
+++ b/DBTUNING/ch12_SORT_GROUPBY_집계/ch12_교안.pptx
@@ -546,7 +546,7 @@
           <a:lstStyle/>
           <a:p>
             <a:r>
-              <a:t>제ch12은 리포트성 쿼리의 뼈대인 집계와 정렬을 다룬다. 이 두 연산은 앞 단계 결과가 다 모여야 처리되는 블로킹 연산이라 자원 소비가 크고, 그만큼 "언제 생략되는가"가 중요하다. 이번 장은 두 가지 흔한 통념 — 필터를 먼저 걸어야 집계가 빠르다, 인덱스 컬럼으로 정렬하면 정렬이 생략된다 — 를 실습 DB 실측으로 검증한다. 두 통념 모두 조건이 붙어야 성립한다는 것이 결론이다. 첫 시간에는 챕터 번호와 부제만 짚고 넘어가되, 이번 장의 결론이 결국 실행계획을 봐야 안다로 귀결된다는 점만 예고해 두면 학습자가 실측 결과를 기다리는 자세로 듣게 된다.</a:t>
+              <a:t>ch12은 리포트성 쿼리의 뼈대인 집계와 정렬을 다룬다. 이 두 연산은 앞 단계 결과가 다 모여야 처리되는 블로킹 연산이라 자원 소비가 크고, 그만큼 "언제 생략되는가"가 중요하다. 이번 장은 두 가지 흔한 통념 — 필터를 먼저 걸어야 집계가 빠르다, 인덱스 컬럼으로 정렬하면 정렬이 생략된다 — 를 실습 DB 실측으로 검증한다. 두 통념 모두 조건이 붙어야 성립한다는 것이 결론이다. 첫 시간에는 챕터 번호와 부제만 짚고 넘어가되, 이번 장의 결론이 결국 실행계획을 봐야 안다로 귀결된다는 점만 예고해 두면 학습자가 실측 결과를 기다리는 자세로 듣게 된다.</a:t>
             </a:r>
           </a:p>
         </p:txBody>
@@ -6713,7 +6713,7 @@
                 </a:solidFill>
                 <a:latin typeface="Malgun Gothic"/>
               </a:rPr>
-              <a:t>Oracle SQL 튜닝 과정  ·  제ch12</a:t>
+              <a:t>Oracle SQL 튜닝 과정  ·  ch12</a:t>
             </a:r>
           </a:p>
         </p:txBody>
